--- a/MALC_Forecast_2026_Budget_2027_Revised.pptx
+++ b/MALC_Forecast_2026_Budget_2027_Revised.pptx
@@ -310,7 +310,7 @@
           <a:p>
             <a:fld id="{5BCAD085-E8A6-8845-BD4E-CB4CCA059FC4}" type="datetimeFigureOut">
               <a:rPr lang="en-US" smtClean="0"/>
-              <a:t>10/16/2026</a:t>
+              <a:t>10/17/2026</a:t>
             </a:fld>
             <a:endParaRPr lang="en-US"/>
           </a:p>
@@ -478,7 +478,7 @@
           <a:p>
             <a:fld id="{5BCAD085-E8A6-8845-BD4E-CB4CCA059FC4}" type="datetimeFigureOut">
               <a:rPr lang="en-US" smtClean="0"/>
-              <a:t>10/16/2026</a:t>
+              <a:t>10/17/2026</a:t>
             </a:fld>
             <a:endParaRPr lang="en-US"/>
           </a:p>
@@ -656,7 +656,7 @@
           <a:p>
             <a:fld id="{5BCAD085-E8A6-8845-BD4E-CB4CCA059FC4}" type="datetimeFigureOut">
               <a:rPr lang="en-US" smtClean="0"/>
-              <a:t>10/16/2026</a:t>
+              <a:t>10/17/2026</a:t>
             </a:fld>
             <a:endParaRPr lang="en-US"/>
           </a:p>
@@ -824,7 +824,7 @@
           <a:p>
             <a:fld id="{5BCAD085-E8A6-8845-BD4E-CB4CCA059FC4}" type="datetimeFigureOut">
               <a:rPr lang="en-US" smtClean="0"/>
-              <a:t>10/16/2026</a:t>
+              <a:t>10/17/2026</a:t>
             </a:fld>
             <a:endParaRPr lang="en-US"/>
           </a:p>
@@ -1069,7 +1069,7 @@
           <a:p>
             <a:fld id="{5BCAD085-E8A6-8845-BD4E-CB4CCA059FC4}" type="datetimeFigureOut">
               <a:rPr lang="en-US" smtClean="0"/>
-              <a:t>10/16/2026</a:t>
+              <a:t>10/17/2026</a:t>
             </a:fld>
             <a:endParaRPr lang="en-US"/>
           </a:p>
@@ -1354,7 +1354,7 @@
           <a:p>
             <a:fld id="{5BCAD085-E8A6-8845-BD4E-CB4CCA059FC4}" type="datetimeFigureOut">
               <a:rPr lang="en-US" smtClean="0"/>
-              <a:t>10/16/2026</a:t>
+              <a:t>10/17/2026</a:t>
             </a:fld>
             <a:endParaRPr lang="en-US"/>
           </a:p>
@@ -1773,7 +1773,7 @@
           <a:p>
             <a:fld id="{5BCAD085-E8A6-8845-BD4E-CB4CCA059FC4}" type="datetimeFigureOut">
               <a:rPr lang="en-US" smtClean="0"/>
-              <a:t>10/16/2026</a:t>
+              <a:t>10/17/2026</a:t>
             </a:fld>
             <a:endParaRPr lang="en-US"/>
           </a:p>
@@ -1890,7 +1890,7 @@
           <a:p>
             <a:fld id="{5BCAD085-E8A6-8845-BD4E-CB4CCA059FC4}" type="datetimeFigureOut">
               <a:rPr lang="en-US" smtClean="0"/>
-              <a:t>10/16/2026</a:t>
+              <a:t>10/17/2026</a:t>
             </a:fld>
             <a:endParaRPr lang="en-US"/>
           </a:p>
@@ -1985,7 +1985,7 @@
           <a:p>
             <a:fld id="{5BCAD085-E8A6-8845-BD4E-CB4CCA059FC4}" type="datetimeFigureOut">
               <a:rPr lang="en-US" smtClean="0"/>
-              <a:t>10/16/2026</a:t>
+              <a:t>10/17/2026</a:t>
             </a:fld>
             <a:endParaRPr lang="en-US"/>
           </a:p>
@@ -2260,7 +2260,7 @@
           <a:p>
             <a:fld id="{5BCAD085-E8A6-8845-BD4E-CB4CCA059FC4}" type="datetimeFigureOut">
               <a:rPr lang="en-US" smtClean="0"/>
-              <a:t>10/16/2026</a:t>
+              <a:t>10/17/2026</a:t>
             </a:fld>
             <a:endParaRPr lang="en-US"/>
           </a:p>
@@ -2512,7 +2512,7 @@
           <a:p>
             <a:fld id="{5BCAD085-E8A6-8845-BD4E-CB4CCA059FC4}" type="datetimeFigureOut">
               <a:rPr lang="en-US" smtClean="0"/>
-              <a:t>10/16/2026</a:t>
+              <a:t>10/17/2026</a:t>
             </a:fld>
             <a:endParaRPr lang="en-US"/>
           </a:p>
@@ -2723,7 +2723,7 @@
           <a:p>
             <a:fld id="{5BCAD085-E8A6-8845-BD4E-CB4CCA059FC4}" type="datetimeFigureOut">
               <a:rPr lang="en-US" smtClean="0"/>
-              <a:t>10/16/2026</a:t>
+              <a:t>10/17/2026</a:t>
             </a:fld>
             <a:endParaRPr lang="en-US"/>
           </a:p>
